--- a/docs/executive-demo/EXECUTIVE_PRESENTATION.pptx
+++ b/docs/executive-demo/EXECUTIVE_PRESENTATION.pptx
@@ -7082,7 +7082,7 @@
               </a:defRPr>
             </a:pPr>
             <a:r>
-              <a:t>•  NPHIES-native — built against the live NPHIES FHIR sandbox from day one, not retrofitted.</a:t>
+              <a:t>•  NPHIES-native — built against built to the published NPHIES FHIR profiles from day one, not retrofitted — the payer connector is not wired yet (stub in development)</a:t>
             </a:r>
           </a:p>
         </p:txBody>
